--- a/TestX 사용 가이드.pptx
+++ b/TestX 사용 가이드.pptx
@@ -19,6 +19,7 @@
     <p:sldId id="267" r:id="rId18"/>
     <p:sldId id="268" r:id="rId19"/>
     <p:sldId id="269" r:id="rId20"/>
+    <p:sldId id="276" r:id="rId27"/>
     <p:sldId id="270" r:id="rId21"/>
     <p:sldId id="271" r:id="rId22"/>
     <p:sldId id="272" r:id="rId23"/>
@@ -3685,7 +3686,7 @@
                 </a:solidFill>
                 <a:latin typeface="맑은 고딕"/>
               </a:rPr>
-              <a:t>09 / 19</a:t>
+              <a:t>09 / 20</a:t>
             </a:r>
           </a:p>
         </p:txBody>
@@ -5224,7 +5225,7 @@
                 </a:solidFill>
                 <a:latin typeface="맑은 고딕"/>
               </a:rPr>
-              <a:t>10 / 19</a:t>
+              <a:t>10 / 20</a:t>
             </a:r>
           </a:p>
         </p:txBody>
@@ -6573,7 +6574,7 @@
                 </a:solidFill>
                 <a:latin typeface="맑은 고딕"/>
               </a:rPr>
-              <a:t>11 / 19</a:t>
+              <a:t>11 / 20</a:t>
             </a:r>
           </a:p>
         </p:txBody>
@@ -7455,7 +7456,7 @@
                 </a:solidFill>
                 <a:latin typeface="맑은 고딕"/>
               </a:rPr>
-              <a:t>정답과 같은 케이스 수</a:t>
+              <a:t>맞은 수 · 수동 통과 포함</a:t>
             </a:r>
           </a:p>
         </p:txBody>
@@ -8077,7 +8078,7 @@
                 </a:solidFill>
                 <a:latin typeface="맑은 고딕"/>
               </a:rPr>
-              <a:t>12 / 19</a:t>
+              <a:t>12 / 20</a:t>
             </a:r>
           </a:p>
         </p:txBody>
@@ -9498,7 +9499,7 @@
                 </a:solidFill>
                 <a:latin typeface="맑은 고딕"/>
               </a:rPr>
-              <a:t>재테스트</a:t>
+              <a:t>재실행</a:t>
             </a:r>
           </a:p>
         </p:txBody>
@@ -9581,7 +9582,7 @@
                 </a:solidFill>
                 <a:latin typeface="맑은 고딕"/>
               </a:rPr>
-              <a:t>13 / 19</a:t>
+              <a:t>13 / 20</a:t>
             </a:r>
           </a:p>
         </p:txBody>
@@ -10418,7 +10419,7 @@
                 </a:solidFill>
                 <a:latin typeface="맑은 고딕"/>
               </a:rPr>
-              <a:t>선택 재테스트</a:t>
+              <a:t>선택 재실행</a:t>
             </a:r>
           </a:p>
         </p:txBody>
@@ -10551,7 +10552,7 @@
                 </a:solidFill>
                 <a:latin typeface="맑은 고딕"/>
               </a:rPr>
-              <a:t>불일치 재테스트</a:t>
+              <a:t>불일치 재실행</a:t>
             </a:r>
           </a:p>
         </p:txBody>
@@ -10723,7 +10724,7 @@
                 </a:solidFill>
                 <a:latin typeface="맑은 고딕"/>
               </a:rPr>
-              <a:t>소요 · 엔진 · 케이스 수</a:t>
+              <a:t>최초 · 마지막 소요</a:t>
             </a:r>
           </a:p>
         </p:txBody>
@@ -10941,7 +10942,7 @@
                 </a:solidFill>
                 <a:latin typeface="맑은 고딕"/>
               </a:rPr>
-              <a:t>고친 뒤 전체를 다시 돌리지 말고, 틀린 것만 다시 — 같은 실행에 이어서 기록됩니다</a:t>
+              <a:t>새 기록이 생기지 않습니다 — 그 실행의 해당 케이스 결과만 덮이고, 다시 돌린 줄에는 재실행 표시가 붙습니다</a:t>
             </a:r>
           </a:p>
         </p:txBody>
@@ -11164,7 +11165,7 @@
                 </a:solidFill>
                 <a:latin typeface="맑은 고딕"/>
               </a:rPr>
-              <a:t>14 / 19</a:t>
+              <a:t>15 / 20</a:t>
             </a:r>
           </a:p>
         </p:txBody>
@@ -12517,7 +12518,7 @@
                 </a:solidFill>
                 <a:latin typeface="맑은 고딕"/>
               </a:rPr>
-              <a:t>15 / 19</a:t>
+              <a:t>16 / 20</a:t>
             </a:r>
           </a:p>
         </p:txBody>
@@ -14017,7 +14018,7 @@
                 </a:solidFill>
                 <a:latin typeface="맑은 고딕"/>
               </a:rPr>
-              <a:t>16 / 19</a:t>
+              <a:t>17 / 20</a:t>
             </a:r>
           </a:p>
         </p:txBody>
@@ -15556,7 +15557,7 @@
                 </a:solidFill>
                 <a:latin typeface="맑은 고딕"/>
               </a:rPr>
-              <a:t>17 / 19</a:t>
+              <a:t>18 / 20</a:t>
             </a:r>
           </a:p>
         </p:txBody>
@@ -16797,7 +16798,7 @@
                 </a:solidFill>
                 <a:latin typeface="맑은 고딕"/>
               </a:rPr>
-              <a:t>이 질문을 케이스로</a:t>
+              <a:t>직접 입력 기록에서만</a:t>
             </a:r>
           </a:p>
         </p:txBody>
@@ -16891,7 +16892,7 @@
                 </a:solidFill>
                 <a:latin typeface="맑은 고딕"/>
               </a:rPr>
-              <a:t>선택 재테스트</a:t>
+              <a:t>선택 재실행</a:t>
             </a:r>
           </a:p>
         </p:txBody>
@@ -17024,7 +17025,7 @@
                 </a:solidFill>
                 <a:latin typeface="맑은 고딕"/>
               </a:rPr>
-              <a:t>불일치 재테스트</a:t>
+              <a:t>불일치 재실행</a:t>
             </a:r>
           </a:p>
         </p:txBody>
@@ -17286,7 +17287,7 @@
                 </a:solidFill>
                 <a:latin typeface="맑은 고딕"/>
               </a:rPr>
-              <a:t>18 / 19</a:t>
+              <a:t>19 / 20</a:t>
             </a:r>
           </a:p>
         </p:txBody>
@@ -17971,7 +17972,7 @@
                 </a:solidFill>
                 <a:latin typeface="맑은 고딕"/>
               </a:rPr>
-              <a:t>01 / 19</a:t>
+              <a:t>01 / 20</a:t>
             </a:r>
           </a:p>
         </p:txBody>
@@ -19174,7 +19175,7 @@
                 </a:solidFill>
                 <a:latin typeface="맑은 고딕"/>
               </a:rPr>
-              <a:t>19 / 19</a:t>
+              <a:t>20 / 20</a:t>
             </a:r>
           </a:p>
         </p:txBody>
@@ -20300,6 +20301,1209 @@
                 <a:latin typeface="맑은 고딕"/>
               </a:rPr>
               <a:t>사이드바 아래 DB 점 확인</a:t>
+            </a:r>
+          </a:p>
+        </p:txBody>
+      </p:sp>
+    </p:spTree>
+  </p:cSld>
+  <p:clrMapOvr>
+    <a:masterClrMapping/>
+  </p:clrMapOvr>
+</p:sld>
+</file>
+
+<file path=ppt/slides/slide21.xml><?xml version="1.0" encoding="utf-8"?>
+<p:sld xmlns:a="http://schemas.openxmlformats.org/drawingml/2006/main" xmlns:p="http://schemas.openxmlformats.org/presentationml/2006/main" xmlns:r="http://schemas.openxmlformats.org/officeDocument/2006/relationships">
+  <p:cSld>
+    <p:spTree>
+      <p:nvGrpSpPr>
+        <p:cNvPr id="1" name=""/>
+        <p:cNvGrpSpPr/>
+        <p:nvPr/>
+      </p:nvGrpSpPr>
+      <p:grpSpPr/>
+      <p:sp>
+        <p:nvSpPr>
+          <p:cNvPr id="2" name="Rectangle 1"/>
+          <p:cNvSpPr/>
+          <p:nvPr/>
+        </p:nvSpPr>
+        <p:spPr>
+          <a:xfrm>
+            <a:off x="0" y="0"/>
+            <a:ext cx="12191695" cy="6858000"/>
+          </a:xfrm>
+          <a:prstGeom prst="rect">
+            <a:avLst/>
+          </a:prstGeom>
+          <a:solidFill>
+            <a:srgbClr val="F2F3F5"/>
+          </a:solidFill>
+          <a:ln>
+            <a:noFill/>
+          </a:ln>
+          <a:effectLst/>
+        </p:spPr>
+        <p:style>
+          <a:lnRef idx="1">
+            <a:schemeClr val="accent1"/>
+          </a:lnRef>
+          <a:fillRef idx="3">
+            <a:schemeClr val="accent1"/>
+          </a:fillRef>
+          <a:effectRef idx="2">
+            <a:schemeClr val="accent1"/>
+          </a:effectRef>
+          <a:fontRef idx="minor">
+            <a:schemeClr val="lt1"/>
+          </a:fontRef>
+        </p:style>
+        <p:txBody>
+          <a:bodyPr rtlCol="0" anchor="ctr" wrap="square"/>
+          <a:lstStyle/>
+          <a:p>
+            <a:pPr algn="ctr"/>
+          </a:p>
+        </p:txBody>
+      </p:sp>
+      <p:sp>
+        <p:nvSpPr>
+          <p:cNvPr id="3" name="TextBox 2"/>
+          <p:cNvSpPr txBox="1"/>
+          <p:nvPr/>
+        </p:nvSpPr>
+        <p:spPr>
+          <a:xfrm>
+            <a:off x="566928" y="402336"/>
+            <a:ext cx="11057839" cy="201168"/>
+          </a:xfrm>
+          <a:prstGeom prst="rect">
+            <a:avLst/>
+          </a:prstGeom>
+          <a:noFill/>
+        </p:spPr>
+        <p:txBody>
+          <a:bodyPr wrap="square" lIns="0" rIns="0" tIns="0" bIns="0" anchor="t">
+            <a:spAutoFit/>
+          </a:bodyPr>
+          <a:lstStyle/>
+          <a:p>
+            <a:pPr algn="l">
+              <a:lnSpc>
+                <a:spcPct val="115000"/>
+              </a:lnSpc>
+            </a:pPr>
+            <a:r>
+              <a:rPr sz="1050" b="1">
+                <a:solidFill>
+                  <a:srgbClr val="E06B1B"/>
+                </a:solidFill>
+                <a:latin typeface="맑은 고딕"/>
+              </a:rPr>
+              <a:t>결과</a:t>
+            </a:r>
+          </a:p>
+        </p:txBody>
+      </p:sp>
+      <p:sp>
+        <p:nvSpPr>
+          <p:cNvPr id="4" name="TextBox 3"/>
+          <p:cNvSpPr txBox="1"/>
+          <p:nvPr/>
+        </p:nvSpPr>
+        <p:spPr>
+          <a:xfrm>
+            <a:off x="566928" y="603504"/>
+            <a:ext cx="9777679" cy="502920"/>
+          </a:xfrm>
+          <a:prstGeom prst="rect">
+            <a:avLst/>
+          </a:prstGeom>
+          <a:noFill/>
+        </p:spPr>
+        <p:txBody>
+          <a:bodyPr wrap="square" lIns="0" rIns="0" tIns="0" bIns="0" anchor="t">
+            <a:spAutoFit/>
+          </a:bodyPr>
+          <a:lstStyle/>
+          <a:p>
+            <a:pPr algn="l">
+              <a:lnSpc>
+                <a:spcPct val="115000"/>
+              </a:lnSpc>
+            </a:pPr>
+            <a:r>
+              <a:rPr sz="3000" b="1">
+                <a:solidFill>
+                  <a:srgbClr val="25292F"/>
+                </a:solidFill>
+                <a:latin typeface="맑은 고딕"/>
+              </a:rPr>
+              <a:t>불일치 정리</a:t>
+            </a:r>
+          </a:p>
+        </p:txBody>
+      </p:sp>
+      <p:sp>
+        <p:nvSpPr>
+          <p:cNvPr id="5" name="Rectangle 4"/>
+          <p:cNvSpPr/>
+          <p:nvPr/>
+        </p:nvSpPr>
+        <p:spPr>
+          <a:xfrm>
+            <a:off x="566928" y="1152144"/>
+            <a:ext cx="566928" cy="41148"/>
+          </a:xfrm>
+          <a:prstGeom prst="rect">
+            <a:avLst/>
+          </a:prstGeom>
+          <a:solidFill>
+            <a:srgbClr val="E06B1B"/>
+          </a:solidFill>
+          <a:ln>
+            <a:noFill/>
+          </a:ln>
+          <a:effectLst/>
+        </p:spPr>
+        <p:style>
+          <a:lnRef idx="1">
+            <a:schemeClr val="accent1"/>
+          </a:lnRef>
+          <a:fillRef idx="3">
+            <a:schemeClr val="accent1"/>
+          </a:fillRef>
+          <a:effectRef idx="2">
+            <a:schemeClr val="accent1"/>
+          </a:effectRef>
+          <a:fontRef idx="minor">
+            <a:schemeClr val="lt1"/>
+          </a:fontRef>
+        </p:style>
+        <p:txBody>
+          <a:bodyPr rtlCol="0" anchor="ctr" wrap="square"/>
+          <a:lstStyle/>
+          <a:p>
+            <a:pPr algn="ctr"/>
+          </a:p>
+        </p:txBody>
+      </p:sp>
+      <p:sp>
+        <p:nvSpPr>
+          <p:cNvPr id="6" name="TextBox 5"/>
+          <p:cNvSpPr txBox="1"/>
+          <p:nvPr/>
+        </p:nvSpPr>
+        <p:spPr>
+          <a:xfrm>
+            <a:off x="9795967" y="731520"/>
+            <a:ext cx="1828800" cy="237744"/>
+          </a:xfrm>
+          <a:prstGeom prst="rect">
+            <a:avLst/>
+          </a:prstGeom>
+          <a:noFill/>
+        </p:spPr>
+        <p:txBody>
+          <a:bodyPr wrap="square" lIns="0" rIns="0" tIns="0" bIns="0" anchor="t">
+            <a:spAutoFit/>
+          </a:bodyPr>
+          <a:lstStyle/>
+          <a:p>
+            <a:pPr algn="r">
+              <a:lnSpc>
+                <a:spcPct val="115000"/>
+              </a:lnSpc>
+            </a:pPr>
+            <a:r>
+              <a:rPr sz="1100" b="1">
+                <a:solidFill>
+                  <a:srgbClr val="8A919B"/>
+                </a:solidFill>
+                <a:latin typeface="맑은 고딕"/>
+              </a:rPr>
+              <a:t>14 / 20</a:t>
+            </a:r>
+          </a:p>
+        </p:txBody>
+      </p:sp>
+      <p:sp>
+        <p:nvSpPr>
+          <p:cNvPr id="7" name="TextBox 6"/>
+          <p:cNvSpPr txBox="1"/>
+          <p:nvPr/>
+        </p:nvSpPr>
+        <p:spPr>
+          <a:xfrm>
+            <a:off x="566928" y="6400800"/>
+            <a:ext cx="5486400" cy="201168"/>
+          </a:xfrm>
+          <a:prstGeom prst="rect">
+            <a:avLst/>
+          </a:prstGeom>
+          <a:noFill/>
+        </p:spPr>
+        <p:txBody>
+          <a:bodyPr wrap="square" lIns="0" rIns="0" tIns="0" bIns="0" anchor="t">
+            <a:spAutoFit/>
+          </a:bodyPr>
+          <a:lstStyle/>
+          <a:p>
+            <a:pPr algn="l">
+              <a:lnSpc>
+                <a:spcPct val="115000"/>
+              </a:lnSpc>
+            </a:pPr>
+            <a:r>
+              <a:rPr sz="850" b="0">
+                <a:solidFill>
+                  <a:srgbClr val="8A919B"/>
+                </a:solidFill>
+                <a:latin typeface="맑은 고딕"/>
+              </a:rPr>
+              <a:t>TestX 사용 가이드</a:t>
+            </a:r>
+          </a:p>
+        </p:txBody>
+      </p:sp>
+      <p:sp>
+        <p:nvSpPr>
+          <p:cNvPr id="8" name="Rounded Rectangle 7"/>
+          <p:cNvSpPr/>
+          <p:nvPr/>
+        </p:nvSpPr>
+        <p:spPr>
+          <a:xfrm>
+            <a:off x="566928" y="1874519"/>
+            <a:ext cx="3259226" cy="1828800"/>
+          </a:xfrm>
+          <a:prstGeom prst="roundRect">
+            <a:avLst>
+              <a:gd name="adj" fmla="val 4500"/>
+            </a:avLst>
+          </a:prstGeom>
+          <a:solidFill>
+            <a:srgbClr val="FFFFFF"/>
+          </a:solidFill>
+          <a:ln w="12700">
+            <a:solidFill>
+              <a:srgbClr val="DFE2E6"/>
+            </a:solidFill>
+          </a:ln>
+          <a:effectLst/>
+        </p:spPr>
+        <p:style>
+          <a:lnRef idx="1">
+            <a:schemeClr val="accent1"/>
+          </a:lnRef>
+          <a:fillRef idx="3">
+            <a:schemeClr val="accent1"/>
+          </a:fillRef>
+          <a:effectRef idx="2">
+            <a:schemeClr val="accent1"/>
+          </a:effectRef>
+          <a:fontRef idx="minor">
+            <a:schemeClr val="lt1"/>
+          </a:fontRef>
+        </p:style>
+        <p:txBody>
+          <a:bodyPr rtlCol="0" anchor="ctr" wrap="square"/>
+          <a:lstStyle/>
+          <a:p>
+            <a:pPr algn="ctr"/>
+          </a:p>
+        </p:txBody>
+      </p:sp>
+      <p:sp>
+        <p:nvSpPr>
+          <p:cNvPr id="9" name="Oval 8"/>
+          <p:cNvSpPr/>
+          <p:nvPr/>
+        </p:nvSpPr>
+        <p:spPr>
+          <a:xfrm>
+            <a:off x="859536" y="2167128"/>
+            <a:ext cx="420624" cy="420624"/>
+          </a:xfrm>
+          <a:prstGeom prst="ellipse">
+            <a:avLst/>
+          </a:prstGeom>
+          <a:solidFill>
+            <a:srgbClr val="E06B1B"/>
+          </a:solidFill>
+          <a:ln w="15875">
+            <a:solidFill>
+              <a:srgbClr val="FFFFFF"/>
+            </a:solidFill>
+          </a:ln>
+          <a:effectLst/>
+        </p:spPr>
+        <p:style>
+          <a:lnRef idx="1">
+            <a:schemeClr val="accent1"/>
+          </a:lnRef>
+          <a:fillRef idx="3">
+            <a:schemeClr val="accent1"/>
+          </a:fillRef>
+          <a:effectRef idx="2">
+            <a:schemeClr val="accent1"/>
+          </a:effectRef>
+          <a:fontRef idx="minor">
+            <a:schemeClr val="lt1"/>
+          </a:fontRef>
+        </p:style>
+        <p:txBody>
+          <a:bodyPr rtlCol="0" anchor="ctr" lIns="0" rIns="0" tIns="0" bIns="0"/>
+          <a:lstStyle/>
+          <a:p>
+            <a:pPr algn="ctr"/>
+            <a:r>
+              <a:rPr sz="1800" b="1">
+                <a:solidFill>
+                  <a:srgbClr val="FFFFFF"/>
+                </a:solidFill>
+                <a:latin typeface="맑은 고딕"/>
+              </a:rPr>
+              <a:t>1</a:t>
+            </a:r>
+          </a:p>
+        </p:txBody>
+      </p:sp>
+      <p:sp>
+        <p:nvSpPr>
+          <p:cNvPr id="10" name="TextBox 9"/>
+          <p:cNvSpPr txBox="1"/>
+          <p:nvPr/>
+        </p:nvSpPr>
+        <p:spPr>
+          <a:xfrm>
+            <a:off x="1481328" y="2212848"/>
+            <a:ext cx="2161946" cy="320040"/>
+          </a:xfrm>
+          <a:prstGeom prst="rect">
+            <a:avLst/>
+          </a:prstGeom>
+          <a:noFill/>
+        </p:spPr>
+        <p:txBody>
+          <a:bodyPr wrap="square" lIns="0" rIns="0" tIns="0" bIns="0" anchor="t">
+            <a:spAutoFit/>
+          </a:bodyPr>
+          <a:lstStyle/>
+          <a:p>
+            <a:pPr algn="l">
+              <a:lnSpc>
+                <a:spcPct val="115000"/>
+              </a:lnSpc>
+            </a:pPr>
+            <a:r>
+              <a:rPr sz="1700" b="1">
+                <a:solidFill>
+                  <a:srgbClr val="25292F"/>
+                </a:solidFill>
+                <a:latin typeface="맑은 고딕"/>
+              </a:rPr>
+              <a:t>일치 처리</a:t>
+            </a:r>
+          </a:p>
+        </p:txBody>
+      </p:sp>
+      <p:sp>
+        <p:nvSpPr>
+          <p:cNvPr id="11" name="TextBox 10"/>
+          <p:cNvSpPr txBox="1"/>
+          <p:nvPr/>
+        </p:nvSpPr>
+        <p:spPr>
+          <a:xfrm>
+            <a:off x="1069848" y="2852928"/>
+            <a:ext cx="2436266" cy="822960"/>
+          </a:xfrm>
+          <a:prstGeom prst="rect">
+            <a:avLst/>
+          </a:prstGeom>
+          <a:noFill/>
+        </p:spPr>
+        <p:txBody>
+          <a:bodyPr wrap="square" lIns="0" rIns="0" tIns="0" bIns="0" anchor="t">
+            <a:spAutoFit/>
+          </a:bodyPr>
+          <a:lstStyle/>
+          <a:p>
+            <a:pPr algn="l">
+              <a:lnSpc>
+                <a:spcPct val="145000"/>
+              </a:lnSpc>
+            </a:pPr>
+            <a:r>
+              <a:rPr sz="1200" b="0">
+                <a:solidFill>
+                  <a:srgbClr val="555C66"/>
+                </a:solidFill>
+                <a:latin typeface="맑은 고딕"/>
+              </a:rPr>
+              <a:t>케이스 줄의 「일치 처리」</a:t>
+            </a:r>
+          </a:p>
+          <a:p>
+            <a:pPr algn="l">
+              <a:lnSpc>
+                <a:spcPct val="145000"/>
+              </a:lnSpc>
+            </a:pPr>
+            <a:r>
+              <a:rPr sz="1200" b="0">
+                <a:solidFill>
+                  <a:srgbClr val="555C66"/>
+                </a:solidFill>
+                <a:latin typeface="맑은 고딕"/>
+              </a:rPr>
+              <a:t>채점은 불일치인 채, 통과로 친다</a:t>
+            </a:r>
+          </a:p>
+        </p:txBody>
+      </p:sp>
+      <p:cxnSp>
+        <p:nvCxnSpPr>
+          <p:cNvPr id="12" name="Connector 11"/>
+          <p:cNvCxnSpPr/>
+          <p:nvPr/>
+        </p:nvCxnSpPr>
+        <p:spPr>
+          <a:xfrm>
+            <a:off x="3954170" y="2788920"/>
+            <a:ext cx="384048" cy="0"/>
+          </a:xfrm>
+          <a:prstGeom prst="line">
+            <a:avLst/>
+          </a:prstGeom>
+          <a:ln w="31750">
+            <a:solidFill>
+              <a:srgbClr val="E06B1B"/>
+            </a:solidFill>
+            <a:tailEnd type="triangle" w="med" len="med"/>
+          </a:ln>
+        </p:spPr>
+        <p:style>
+          <a:lnRef idx="2">
+            <a:schemeClr val="accent1"/>
+          </a:lnRef>
+          <a:fillRef idx="0">
+            <a:schemeClr val="accent1"/>
+          </a:fillRef>
+          <a:effectRef idx="1">
+            <a:schemeClr val="accent1"/>
+          </a:effectRef>
+          <a:fontRef idx="minor">
+            <a:schemeClr val="tx1"/>
+          </a:fontRef>
+        </p:style>
+      </p:cxnSp>
+      <p:sp>
+        <p:nvSpPr>
+          <p:cNvPr id="13" name="Rounded Rectangle 12"/>
+          <p:cNvSpPr/>
+          <p:nvPr/>
+        </p:nvSpPr>
+        <p:spPr>
+          <a:xfrm>
+            <a:off x="4466234" y="1874519"/>
+            <a:ext cx="3259226" cy="1828800"/>
+          </a:xfrm>
+          <a:prstGeom prst="roundRect">
+            <a:avLst>
+              <a:gd name="adj" fmla="val 4500"/>
+            </a:avLst>
+          </a:prstGeom>
+          <a:solidFill>
+            <a:srgbClr val="FFFFFF"/>
+          </a:solidFill>
+          <a:ln w="12700">
+            <a:solidFill>
+              <a:srgbClr val="DFE2E6"/>
+            </a:solidFill>
+          </a:ln>
+          <a:effectLst/>
+        </p:spPr>
+        <p:style>
+          <a:lnRef idx="1">
+            <a:schemeClr val="accent1"/>
+          </a:lnRef>
+          <a:fillRef idx="3">
+            <a:schemeClr val="accent1"/>
+          </a:fillRef>
+          <a:effectRef idx="2">
+            <a:schemeClr val="accent1"/>
+          </a:effectRef>
+          <a:fontRef idx="minor">
+            <a:schemeClr val="lt1"/>
+          </a:fontRef>
+        </p:style>
+        <p:txBody>
+          <a:bodyPr rtlCol="0" anchor="ctr" wrap="square"/>
+          <a:lstStyle/>
+          <a:p>
+            <a:pPr algn="ctr"/>
+          </a:p>
+        </p:txBody>
+      </p:sp>
+      <p:sp>
+        <p:nvSpPr>
+          <p:cNvPr id="14" name="Oval 13"/>
+          <p:cNvSpPr/>
+          <p:nvPr/>
+        </p:nvSpPr>
+        <p:spPr>
+          <a:xfrm>
+            <a:off x="4758842" y="2167128"/>
+            <a:ext cx="420624" cy="420624"/>
+          </a:xfrm>
+          <a:prstGeom prst="ellipse">
+            <a:avLst/>
+          </a:prstGeom>
+          <a:solidFill>
+            <a:srgbClr val="E06B1B"/>
+          </a:solidFill>
+          <a:ln w="15875">
+            <a:solidFill>
+              <a:srgbClr val="FFFFFF"/>
+            </a:solidFill>
+          </a:ln>
+          <a:effectLst/>
+        </p:spPr>
+        <p:style>
+          <a:lnRef idx="1">
+            <a:schemeClr val="accent1"/>
+          </a:lnRef>
+          <a:fillRef idx="3">
+            <a:schemeClr val="accent1"/>
+          </a:fillRef>
+          <a:effectRef idx="2">
+            <a:schemeClr val="accent1"/>
+          </a:effectRef>
+          <a:fontRef idx="minor">
+            <a:schemeClr val="lt1"/>
+          </a:fontRef>
+        </p:style>
+        <p:txBody>
+          <a:bodyPr rtlCol="0" anchor="ctr" lIns="0" rIns="0" tIns="0" bIns="0"/>
+          <a:lstStyle/>
+          <a:p>
+            <a:pPr algn="ctr"/>
+            <a:r>
+              <a:rPr sz="1800" b="1">
+                <a:solidFill>
+                  <a:srgbClr val="FFFFFF"/>
+                </a:solidFill>
+                <a:latin typeface="맑은 고딕"/>
+              </a:rPr>
+              <a:t>2</a:t>
+            </a:r>
+          </a:p>
+        </p:txBody>
+      </p:sp>
+      <p:sp>
+        <p:nvSpPr>
+          <p:cNvPr id="15" name="TextBox 14"/>
+          <p:cNvSpPr txBox="1"/>
+          <p:nvPr/>
+        </p:nvSpPr>
+        <p:spPr>
+          <a:xfrm>
+            <a:off x="5380634" y="2212848"/>
+            <a:ext cx="2161946" cy="320040"/>
+          </a:xfrm>
+          <a:prstGeom prst="rect">
+            <a:avLst/>
+          </a:prstGeom>
+          <a:noFill/>
+        </p:spPr>
+        <p:txBody>
+          <a:bodyPr wrap="square" lIns="0" rIns="0" tIns="0" bIns="0" anchor="t">
+            <a:spAutoFit/>
+          </a:bodyPr>
+          <a:lstStyle/>
+          <a:p>
+            <a:pPr algn="l">
+              <a:lnSpc>
+                <a:spcPct val="115000"/>
+              </a:lnSpc>
+            </a:pPr>
+            <a:r>
+              <a:rPr sz="1700" b="1">
+                <a:solidFill>
+                  <a:srgbClr val="25292F"/>
+                </a:solidFill>
+                <a:latin typeface="맑은 고딕"/>
+              </a:rPr>
+              <a:t>정답 수정</a:t>
+            </a:r>
+          </a:p>
+        </p:txBody>
+      </p:sp>
+      <p:sp>
+        <p:nvSpPr>
+          <p:cNvPr id="16" name="TextBox 15"/>
+          <p:cNvSpPr txBox="1"/>
+          <p:nvPr/>
+        </p:nvSpPr>
+        <p:spPr>
+          <a:xfrm>
+            <a:off x="4969154" y="2852928"/>
+            <a:ext cx="2436266" cy="822960"/>
+          </a:xfrm>
+          <a:prstGeom prst="rect">
+            <a:avLst/>
+          </a:prstGeom>
+          <a:noFill/>
+        </p:spPr>
+        <p:txBody>
+          <a:bodyPr wrap="square" lIns="0" rIns="0" tIns="0" bIns="0" anchor="t">
+            <a:spAutoFit/>
+          </a:bodyPr>
+          <a:lstStyle/>
+          <a:p>
+            <a:pPr algn="l">
+              <a:lnSpc>
+                <a:spcPct val="145000"/>
+              </a:lnSpc>
+            </a:pPr>
+            <a:r>
+              <a:rPr sz="1200" b="0">
+                <a:solidFill>
+                  <a:srgbClr val="555C66"/>
+                </a:solidFill>
+                <a:latin typeface="맑은 고딕"/>
+              </a:rPr>
+              <a:t>그 옆의 「정답 수정」</a:t>
+            </a:r>
+          </a:p>
+          <a:p>
+            <a:pPr algn="l">
+              <a:lnSpc>
+                <a:spcPct val="145000"/>
+              </a:lnSpc>
+            </a:pPr>
+            <a:r>
+              <a:rPr sz="1200" b="0">
+                <a:solidFill>
+                  <a:srgbClr val="555C66"/>
+                </a:solidFill>
+                <a:latin typeface="맑은 고딕"/>
+              </a:rPr>
+              <a:t>데이터셋 정답을 이 답으로</a:t>
+            </a:r>
+          </a:p>
+        </p:txBody>
+      </p:sp>
+      <p:cxnSp>
+        <p:nvCxnSpPr>
+          <p:cNvPr id="17" name="Connector 16"/>
+          <p:cNvCxnSpPr/>
+          <p:nvPr/>
+        </p:nvCxnSpPr>
+        <p:spPr>
+          <a:xfrm>
+            <a:off x="7853476" y="2788920"/>
+            <a:ext cx="384048" cy="0"/>
+          </a:xfrm>
+          <a:prstGeom prst="line">
+            <a:avLst/>
+          </a:prstGeom>
+          <a:ln w="31750">
+            <a:solidFill>
+              <a:srgbClr val="E06B1B"/>
+            </a:solidFill>
+            <a:tailEnd type="triangle" w="med" len="med"/>
+          </a:ln>
+        </p:spPr>
+        <p:style>
+          <a:lnRef idx="2">
+            <a:schemeClr val="accent1"/>
+          </a:lnRef>
+          <a:fillRef idx="0">
+            <a:schemeClr val="accent1"/>
+          </a:fillRef>
+          <a:effectRef idx="1">
+            <a:schemeClr val="accent1"/>
+          </a:effectRef>
+          <a:fontRef idx="minor">
+            <a:schemeClr val="tx1"/>
+          </a:fontRef>
+        </p:style>
+      </p:cxnSp>
+      <p:sp>
+        <p:nvSpPr>
+          <p:cNvPr id="18" name="Rounded Rectangle 17"/>
+          <p:cNvSpPr/>
+          <p:nvPr/>
+        </p:nvSpPr>
+        <p:spPr>
+          <a:xfrm>
+            <a:off x="8365540" y="1874519"/>
+            <a:ext cx="3259226" cy="1828800"/>
+          </a:xfrm>
+          <a:prstGeom prst="roundRect">
+            <a:avLst>
+              <a:gd name="adj" fmla="val 4500"/>
+            </a:avLst>
+          </a:prstGeom>
+          <a:solidFill>
+            <a:srgbClr val="FFFFFF"/>
+          </a:solidFill>
+          <a:ln w="12700">
+            <a:solidFill>
+              <a:srgbClr val="DFE2E6"/>
+            </a:solidFill>
+          </a:ln>
+          <a:effectLst/>
+        </p:spPr>
+        <p:style>
+          <a:lnRef idx="1">
+            <a:schemeClr val="accent1"/>
+          </a:lnRef>
+          <a:fillRef idx="3">
+            <a:schemeClr val="accent1"/>
+          </a:fillRef>
+          <a:effectRef idx="2">
+            <a:schemeClr val="accent1"/>
+          </a:effectRef>
+          <a:fontRef idx="minor">
+            <a:schemeClr val="lt1"/>
+          </a:fontRef>
+        </p:style>
+        <p:txBody>
+          <a:bodyPr rtlCol="0" anchor="ctr" wrap="square"/>
+          <a:lstStyle/>
+          <a:p>
+            <a:pPr algn="ctr"/>
+          </a:p>
+        </p:txBody>
+      </p:sp>
+      <p:sp>
+        <p:nvSpPr>
+          <p:cNvPr id="19" name="Oval 18"/>
+          <p:cNvSpPr/>
+          <p:nvPr/>
+        </p:nvSpPr>
+        <p:spPr>
+          <a:xfrm>
+            <a:off x="8658148" y="2167128"/>
+            <a:ext cx="420624" cy="420624"/>
+          </a:xfrm>
+          <a:prstGeom prst="ellipse">
+            <a:avLst/>
+          </a:prstGeom>
+          <a:solidFill>
+            <a:srgbClr val="E06B1B"/>
+          </a:solidFill>
+          <a:ln w="15875">
+            <a:solidFill>
+              <a:srgbClr val="FFFFFF"/>
+            </a:solidFill>
+          </a:ln>
+          <a:effectLst/>
+        </p:spPr>
+        <p:style>
+          <a:lnRef idx="1">
+            <a:schemeClr val="accent1"/>
+          </a:lnRef>
+          <a:fillRef idx="3">
+            <a:schemeClr val="accent1"/>
+          </a:fillRef>
+          <a:effectRef idx="2">
+            <a:schemeClr val="accent1"/>
+          </a:effectRef>
+          <a:fontRef idx="minor">
+            <a:schemeClr val="lt1"/>
+          </a:fontRef>
+        </p:style>
+        <p:txBody>
+          <a:bodyPr rtlCol="0" anchor="ctr" lIns="0" rIns="0" tIns="0" bIns="0"/>
+          <a:lstStyle/>
+          <a:p>
+            <a:pPr algn="ctr"/>
+            <a:r>
+              <a:rPr sz="1800" b="1">
+                <a:solidFill>
+                  <a:srgbClr val="FFFFFF"/>
+                </a:solidFill>
+                <a:latin typeface="맑은 고딕"/>
+              </a:rPr>
+              <a:t>3</a:t>
+            </a:r>
+          </a:p>
+        </p:txBody>
+      </p:sp>
+      <p:sp>
+        <p:nvSpPr>
+          <p:cNvPr id="20" name="TextBox 19"/>
+          <p:cNvSpPr txBox="1"/>
+          <p:nvPr/>
+        </p:nvSpPr>
+        <p:spPr>
+          <a:xfrm>
+            <a:off x="9279940" y="2212848"/>
+            <a:ext cx="2161946" cy="320040"/>
+          </a:xfrm>
+          <a:prstGeom prst="rect">
+            <a:avLst/>
+          </a:prstGeom>
+          <a:noFill/>
+        </p:spPr>
+        <p:txBody>
+          <a:bodyPr wrap="square" lIns="0" rIns="0" tIns="0" bIns="0" anchor="t">
+            <a:spAutoFit/>
+          </a:bodyPr>
+          <a:lstStyle/>
+          <a:p>
+            <a:pPr algn="l">
+              <a:lnSpc>
+                <a:spcPct val="115000"/>
+              </a:lnSpc>
+            </a:pPr>
+            <a:r>
+              <a:rPr sz="1700" b="1">
+                <a:solidFill>
+                  <a:srgbClr val="25292F"/>
+                </a:solidFill>
+                <a:latin typeface="맑은 고딕"/>
+              </a:rPr>
+              <a:t>불일치 재실행</a:t>
+            </a:r>
+          </a:p>
+        </p:txBody>
+      </p:sp>
+      <p:sp>
+        <p:nvSpPr>
+          <p:cNvPr id="21" name="TextBox 20"/>
+          <p:cNvSpPr txBox="1"/>
+          <p:nvPr/>
+        </p:nvSpPr>
+        <p:spPr>
+          <a:xfrm>
+            <a:off x="8868460" y="2852928"/>
+            <a:ext cx="2436266" cy="822960"/>
+          </a:xfrm>
+          <a:prstGeom prst="rect">
+            <a:avLst/>
+          </a:prstGeom>
+          <a:noFill/>
+        </p:spPr>
+        <p:txBody>
+          <a:bodyPr wrap="square" lIns="0" rIns="0" tIns="0" bIns="0" anchor="t">
+            <a:spAutoFit/>
+          </a:bodyPr>
+          <a:lstStyle/>
+          <a:p>
+            <a:pPr algn="l">
+              <a:lnSpc>
+                <a:spcPct val="145000"/>
+              </a:lnSpc>
+            </a:pPr>
+            <a:r>
+              <a:rPr sz="1200" b="0">
+                <a:solidFill>
+                  <a:srgbClr val="555C66"/>
+                </a:solidFill>
+                <a:latin typeface="맑은 고딕"/>
+              </a:rPr>
+              <a:t>머리줄의 「불일치 재실행」</a:t>
+            </a:r>
+          </a:p>
+          <a:p>
+            <a:pPr algn="l">
+              <a:lnSpc>
+                <a:spcPct val="145000"/>
+              </a:lnSpc>
+            </a:pPr>
+            <a:r>
+              <a:rPr sz="1200" b="0">
+                <a:solidFill>
+                  <a:srgbClr val="555C66"/>
+                </a:solidFill>
+                <a:latin typeface="맑은 고딕"/>
+              </a:rPr>
+              <a:t>고친 뒤 그 케이스만 다시</a:t>
+            </a:r>
+          </a:p>
+        </p:txBody>
+      </p:sp>
+      <p:sp>
+        <p:nvSpPr>
+          <p:cNvPr id="22" name="Rounded Rectangle 21"/>
+          <p:cNvSpPr/>
+          <p:nvPr/>
+        </p:nvSpPr>
+        <p:spPr>
+          <a:xfrm>
+            <a:off x="566928" y="4160520"/>
+            <a:ext cx="11057839" cy="1280160"/>
+          </a:xfrm>
+          <a:prstGeom prst="roundRect">
+            <a:avLst>
+              <a:gd name="adj" fmla="val 3000"/>
+            </a:avLst>
+          </a:prstGeom>
+          <a:solidFill>
+            <a:srgbClr val="FDF0E4"/>
+          </a:solidFill>
+          <a:ln>
+            <a:noFill/>
+          </a:ln>
+          <a:effectLst/>
+        </p:spPr>
+        <p:style>
+          <a:lnRef idx="1">
+            <a:schemeClr val="accent1"/>
+          </a:lnRef>
+          <a:fillRef idx="3">
+            <a:schemeClr val="accent1"/>
+          </a:fillRef>
+          <a:effectRef idx="2">
+            <a:schemeClr val="accent1"/>
+          </a:effectRef>
+          <a:fontRef idx="minor">
+            <a:schemeClr val="lt1"/>
+          </a:fontRef>
+        </p:style>
+        <p:txBody>
+          <a:bodyPr rtlCol="0" anchor="ctr" wrap="square"/>
+          <a:lstStyle/>
+          <a:p>
+            <a:pPr algn="ctr"/>
+          </a:p>
+        </p:txBody>
+      </p:sp>
+      <p:sp>
+        <p:nvSpPr>
+          <p:cNvPr id="23" name="TextBox 22"/>
+          <p:cNvSpPr txBox="1"/>
+          <p:nvPr/>
+        </p:nvSpPr>
+        <p:spPr>
+          <a:xfrm>
+            <a:off x="1024128" y="4389120"/>
+            <a:ext cx="2926080" cy="274320"/>
+          </a:xfrm>
+          <a:prstGeom prst="rect">
+            <a:avLst/>
+          </a:prstGeom>
+          <a:noFill/>
+        </p:spPr>
+        <p:txBody>
+          <a:bodyPr wrap="square" lIns="0" rIns="0" tIns="0" bIns="0" anchor="t">
+            <a:spAutoFit/>
+          </a:bodyPr>
+          <a:lstStyle/>
+          <a:p>
+            <a:pPr algn="l">
+              <a:lnSpc>
+                <a:spcPct val="115000"/>
+              </a:lnSpc>
+            </a:pPr>
+            <a:r>
+              <a:rPr sz="1300" b="1">
+                <a:solidFill>
+                  <a:srgbClr val="B55310"/>
+                </a:solidFill>
+                <a:latin typeface="맑은 고딕"/>
+              </a:rPr>
+              <a:t>집계에 반영됩니다</a:t>
+            </a:r>
+          </a:p>
+        </p:txBody>
+      </p:sp>
+      <p:sp>
+        <p:nvSpPr>
+          <p:cNvPr id="24" name="TextBox 23"/>
+          <p:cNvSpPr txBox="1"/>
+          <p:nvPr/>
+        </p:nvSpPr>
+        <p:spPr>
+          <a:xfrm>
+            <a:off x="1024128" y="4754880"/>
+            <a:ext cx="4937760" cy="640080"/>
+          </a:xfrm>
+          <a:prstGeom prst="rect">
+            <a:avLst/>
+          </a:prstGeom>
+          <a:noFill/>
+        </p:spPr>
+        <p:txBody>
+          <a:bodyPr wrap="square" lIns="0" rIns="0" tIns="0" bIns="0" anchor="t">
+            <a:spAutoFit/>
+          </a:bodyPr>
+          <a:lstStyle/>
+          <a:p>
+            <a:pPr algn="l">
+              <a:lnSpc>
+                <a:spcPct val="150000"/>
+              </a:lnSpc>
+            </a:pPr>
+            <a:r>
+              <a:rPr sz="1200" b="0">
+                <a:solidFill>
+                  <a:srgbClr val="555C66"/>
+                </a:solidFill>
+                <a:latin typeface="맑은 고딕"/>
+              </a:rPr>
+              <a:t>통과시킨 케이스는 맞은 개수에 들어갑니다</a:t>
+            </a:r>
+          </a:p>
+          <a:p>
+            <a:pPr algn="l">
+              <a:lnSpc>
+                <a:spcPct val="150000"/>
+              </a:lnSpc>
+            </a:pPr>
+            <a:r>
+              <a:rPr sz="1200" b="0">
+                <a:solidFill>
+                  <a:srgbClr val="555C66"/>
+                </a:solidFill>
+                <a:latin typeface="맑은 고딕"/>
+              </a:rPr>
+              <a:t>키별 집계와 불일치 재실행 대상에서도 빠집니다</a:t>
+            </a:r>
+          </a:p>
+        </p:txBody>
+      </p:sp>
+      <p:sp>
+        <p:nvSpPr>
+          <p:cNvPr id="25" name="Rectangle 24"/>
+          <p:cNvSpPr/>
+          <p:nvPr/>
+        </p:nvSpPr>
+        <p:spPr>
+          <a:xfrm>
+            <a:off x="6327648" y="4389120"/>
+            <a:ext cx="18288" cy="868680"/>
+          </a:xfrm>
+          <a:prstGeom prst="rect">
+            <a:avLst/>
+          </a:prstGeom>
+          <a:solidFill>
+            <a:srgbClr val="DFE2E6"/>
+          </a:solidFill>
+          <a:ln>
+            <a:noFill/>
+          </a:ln>
+          <a:effectLst/>
+        </p:spPr>
+        <p:style>
+          <a:lnRef idx="1">
+            <a:schemeClr val="accent1"/>
+          </a:lnRef>
+          <a:fillRef idx="3">
+            <a:schemeClr val="accent1"/>
+          </a:fillRef>
+          <a:effectRef idx="2">
+            <a:schemeClr val="accent1"/>
+          </a:effectRef>
+          <a:fontRef idx="minor">
+            <a:schemeClr val="lt1"/>
+          </a:fontRef>
+        </p:style>
+        <p:txBody>
+          <a:bodyPr rtlCol="0" anchor="ctr" wrap="square"/>
+          <a:lstStyle/>
+          <a:p>
+            <a:pPr algn="ctr"/>
+          </a:p>
+        </p:txBody>
+      </p:sp>
+      <p:sp>
+        <p:nvSpPr>
+          <p:cNvPr id="26" name="TextBox 25"/>
+          <p:cNvSpPr txBox="1"/>
+          <p:nvPr/>
+        </p:nvSpPr>
+        <p:spPr>
+          <a:xfrm>
+            <a:off x="6784848" y="4389120"/>
+            <a:ext cx="2743200" cy="274320"/>
+          </a:xfrm>
+          <a:prstGeom prst="rect">
+            <a:avLst/>
+          </a:prstGeom>
+          <a:noFill/>
+        </p:spPr>
+        <p:txBody>
+          <a:bodyPr wrap="square" lIns="0" rIns="0" tIns="0" bIns="0" anchor="t">
+            <a:spAutoFit/>
+          </a:bodyPr>
+          <a:lstStyle/>
+          <a:p>
+            <a:pPr algn="l">
+              <a:lnSpc>
+                <a:spcPct val="115000"/>
+              </a:lnSpc>
+            </a:pPr>
+            <a:r>
+              <a:rPr sz="1300" b="1">
+                <a:solidFill>
+                  <a:srgbClr val="B55310"/>
+                </a:solidFill>
+                <a:latin typeface="맑은 고딕"/>
+              </a:rPr>
+              <a:t>기록은 그대로입니다</a:t>
+            </a:r>
+          </a:p>
+        </p:txBody>
+      </p:sp>
+      <p:sp>
+        <p:nvSpPr>
+          <p:cNvPr id="27" name="TextBox 26"/>
+          <p:cNvSpPr txBox="1"/>
+          <p:nvPr/>
+        </p:nvSpPr>
+        <p:spPr>
+          <a:xfrm>
+            <a:off x="6784848" y="4754880"/>
+            <a:ext cx="4206240" cy="640080"/>
+          </a:xfrm>
+          <a:prstGeom prst="rect">
+            <a:avLst/>
+          </a:prstGeom>
+          <a:noFill/>
+        </p:spPr>
+        <p:txBody>
+          <a:bodyPr wrap="square" lIns="0" rIns="0" tIns="0" bIns="0" anchor="t">
+            <a:spAutoFit/>
+          </a:bodyPr>
+          <a:lstStyle/>
+          <a:p>
+            <a:pPr algn="l">
+              <a:lnSpc>
+                <a:spcPct val="150000"/>
+              </a:lnSpc>
+            </a:pPr>
+            <a:r>
+              <a:rPr sz="1200" b="0">
+                <a:solidFill>
+                  <a:srgbClr val="555C66"/>
+                </a:solidFill>
+                <a:latin typeface="맑은 고딕"/>
+              </a:rPr>
+              <a:t>지난 실행은 그때의 정답지로 채점된 사실입니다</a:t>
+            </a:r>
+          </a:p>
+          <a:p>
+            <a:pPr algn="l">
+              <a:lnSpc>
+                <a:spcPct val="150000"/>
+              </a:lnSpc>
+            </a:pPr>
+            <a:r>
+              <a:rPr sz="1200" b="0">
+                <a:solidFill>
+                  <a:srgbClr val="555C66"/>
+                </a:solidFill>
+                <a:latin typeface="맑은 고딕"/>
+              </a:rPr>
+              <a:t>정답을 고쳐도 그 기록은 바뀌지 않습니다</a:t>
             </a:r>
           </a:p>
         </p:txBody>
@@ -20522,7 +21726,7 @@
                 </a:solidFill>
                 <a:latin typeface="맑은 고딕"/>
               </a:rPr>
-              <a:t>02 / 19</a:t>
+              <a:t>02 / 20</a:t>
             </a:r>
           </a:p>
         </p:txBody>
@@ -22026,7 +23230,7 @@
                 </a:solidFill>
                 <a:latin typeface="맑은 고딕"/>
               </a:rPr>
-              <a:t>03 / 19</a:t>
+              <a:t>03 / 20</a:t>
             </a:r>
           </a:p>
         </p:txBody>
@@ -23526,7 +24730,7 @@
                 </a:solidFill>
                 <a:latin typeface="맑은 고딕"/>
               </a:rPr>
-              <a:t>04 / 19</a:t>
+              <a:t>04 / 20</a:t>
             </a:r>
           </a:p>
         </p:txBody>
@@ -25494,7 +26698,7 @@
                 </a:solidFill>
                 <a:latin typeface="맑은 고딕"/>
               </a:rPr>
-              <a:t>05 / 19</a:t>
+              <a:t>05 / 20</a:t>
             </a:r>
           </a:p>
         </p:txBody>
@@ -26758,7 +27962,7 @@
                 </a:solidFill>
                 <a:latin typeface="맑은 고딕"/>
               </a:rPr>
-              <a:t>06 / 19</a:t>
+              <a:t>06 / 20</a:t>
             </a:r>
           </a:p>
         </p:txBody>
@@ -28726,7 +29930,7 @@
                 </a:solidFill>
                 <a:latin typeface="맑은 고딕"/>
               </a:rPr>
-              <a:t>07 / 19</a:t>
+              <a:t>07 / 20</a:t>
             </a:r>
           </a:p>
         </p:txBody>
@@ -29992,7 +31196,7 @@
                 </a:solidFill>
                 <a:latin typeface="맑은 고딕"/>
               </a:rPr>
-              <a:t>08 / 19</a:t>
+              <a:t>08 / 20</a:t>
             </a:r>
           </a:p>
         </p:txBody>
